--- a/rme work/slides.pptx
+++ b/rme work/slides.pptx
@@ -109,6 +109,11 @@
       </a:defRPr>
     </a:lvl9pPr>
   </p:defaultTextStyle>
+  <p:extLst>
+    <p:ext uri="{EFAFB233-063F-42B5-8137-9DF3F51BA10A}">
+      <p15:sldGuideLst xmlns:p15="http://schemas.microsoft.com/office/powerpoint/2012/main"/>
+    </p:ext>
+  </p:extLst>
 </p:presentation>
 </file>
 
@@ -386,7 +391,7 @@
           <a:p>
             <a:fld id="{6444479B-705B-4489-957E-7E8A228BDFA0}" type="datetime1">
               <a:rPr lang="en-US" smtClean="0"/>
-              <a:t>11/18/2025</a:t>
+              <a:t>11/19/2025</a:t>
             </a:fld>
             <a:endParaRPr lang="en-US"/>
           </a:p>
@@ -800,7 +805,7 @@
           <a:p>
             <a:fld id="{7DA38F49-B3E2-4BF0-BEC7-C30D34ABBB8D}" type="datetime1">
               <a:rPr lang="en-US" smtClean="0"/>
-              <a:t>11/18/2025</a:t>
+              <a:t>11/19/2025</a:t>
             </a:fld>
             <a:endParaRPr lang="en-US"/>
           </a:p>
@@ -1137,7 +1142,7 @@
           <a:p>
             <a:fld id="{7DA38F49-B3E2-4BF0-BEC7-C30D34ABBB8D}" type="datetime1">
               <a:rPr lang="en-US" smtClean="0"/>
-              <a:t>11/18/2025</a:t>
+              <a:t>11/19/2025</a:t>
             </a:fld>
             <a:endParaRPr lang="en-US"/>
           </a:p>
@@ -1543,7 +1548,7 @@
           <a:p>
             <a:fld id="{7DA38F49-B3E2-4BF0-BEC7-C30D34ABBB8D}" type="datetime1">
               <a:rPr lang="en-US" smtClean="0"/>
-              <a:t>11/18/2025</a:t>
+              <a:t>11/19/2025</a:t>
             </a:fld>
             <a:endParaRPr lang="en-US"/>
           </a:p>
@@ -2112,7 +2117,7 @@
           <a:p>
             <a:fld id="{7DA38F49-B3E2-4BF0-BEC7-C30D34ABBB8D}" type="datetime1">
               <a:rPr lang="en-US" smtClean="0"/>
-              <a:t>11/18/2025</a:t>
+              <a:t>11/19/2025</a:t>
             </a:fld>
             <a:endParaRPr lang="en-US"/>
           </a:p>
@@ -2794,7 +2799,7 @@
           <a:p>
             <a:fld id="{7DA38F49-B3E2-4BF0-BEC7-C30D34ABBB8D}" type="datetime1">
               <a:rPr lang="en-US" smtClean="0"/>
-              <a:t>11/18/2025</a:t>
+              <a:t>11/19/2025</a:t>
             </a:fld>
             <a:endParaRPr lang="en-US"/>
           </a:p>
@@ -3708,7 +3713,7 @@
           <a:p>
             <a:fld id="{7DA38F49-B3E2-4BF0-BEC7-C30D34ABBB8D}" type="datetime1">
               <a:rPr lang="en-US" smtClean="0"/>
-              <a:t>11/18/2025</a:t>
+              <a:t>11/19/2025</a:t>
             </a:fld>
             <a:endParaRPr lang="en-US"/>
           </a:p>
@@ -4022,7 +4027,7 @@
           <a:p>
             <a:fld id="{C07B66AD-7C08-490A-ADA4-B47E10FB2407}" type="datetime1">
               <a:rPr lang="en-US" smtClean="0"/>
-              <a:t>11/18/2025</a:t>
+              <a:t>11/19/2025</a:t>
             </a:fld>
             <a:endParaRPr lang="en-US"/>
           </a:p>
@@ -4286,7 +4291,7 @@
           <a:p>
             <a:fld id="{05B95027-4255-49E7-9841-CD21BCC99996}" type="datetime1">
               <a:rPr lang="en-US" smtClean="0"/>
-              <a:t>11/18/2025</a:t>
+              <a:t>11/19/2025</a:t>
             </a:fld>
             <a:endParaRPr lang="en-US"/>
           </a:p>
@@ -4623,7 +4628,7 @@
           <a:p>
             <a:fld id="{9F89F774-3FA6-43B8-9241-99959C8FD463}" type="datetime1">
               <a:rPr lang="en-US" smtClean="0"/>
-              <a:t>11/18/2025</a:t>
+              <a:t>11/19/2025</a:t>
             </a:fld>
             <a:endParaRPr lang="en-US"/>
           </a:p>
@@ -5012,7 +5017,7 @@
           <a:p>
             <a:fld id="{F9504452-5DCC-4FE2-A5C9-8A5EF6714D65}" type="datetime1">
               <a:rPr lang="en-US" smtClean="0"/>
-              <a:t>11/18/2025</a:t>
+              <a:t>11/19/2025</a:t>
             </a:fld>
             <a:endParaRPr lang="en-US"/>
           </a:p>
@@ -5388,7 +5393,7 @@
           <a:p>
             <a:fld id="{E579ABC2-0180-4F3A-A895-A85BC724D472}" type="datetime1">
               <a:rPr lang="en-US" smtClean="0"/>
-              <a:t>11/18/2025</a:t>
+              <a:t>11/19/2025</a:t>
             </a:fld>
             <a:endParaRPr lang="en-US"/>
           </a:p>
@@ -5894,7 +5899,7 @@
           <a:p>
             <a:fld id="{6AEEA9BA-4E8F-439E-BEA4-91FBA01E3F5F}" type="datetime1">
               <a:rPr lang="en-US" smtClean="0"/>
-              <a:t>11/18/2025</a:t>
+              <a:t>11/19/2025</a:t>
             </a:fld>
             <a:endParaRPr lang="en-US"/>
           </a:p>
@@ -6151,7 +6156,7 @@
           <a:p>
             <a:fld id="{BE15BF18-0007-481C-AA29-413124BC3EE7}" type="datetime1">
               <a:rPr lang="en-US" smtClean="0"/>
-              <a:t>11/18/2025</a:t>
+              <a:t>11/19/2025</a:t>
             </a:fld>
             <a:endParaRPr lang="en-US"/>
           </a:p>
@@ -6314,7 +6319,7 @@
           <a:p>
             <a:fld id="{09BE9870-3748-43AD-B547-02A075CB4A1D}" type="datetime1">
               <a:rPr lang="en-US" smtClean="0"/>
-              <a:t>11/18/2025</a:t>
+              <a:t>11/19/2025</a:t>
             </a:fld>
             <a:endParaRPr lang="en-US"/>
           </a:p>
@@ -6704,7 +6709,7 @@
           <a:p>
             <a:fld id="{558E7897-33C5-4F1A-9307-D068E37F3DC7}" type="datetime1">
               <a:rPr lang="en-US" smtClean="0"/>
-              <a:t>11/18/2025</a:t>
+              <a:t>11/19/2025</a:t>
             </a:fld>
             <a:endParaRPr lang="en-US"/>
           </a:p>
@@ -7113,7 +7118,7 @@
           <a:p>
             <a:fld id="{82E171BA-CC09-47C8-A6DF-F5C5CB59CEEC}" type="datetime1">
               <a:rPr lang="en-US" smtClean="0"/>
-              <a:t>11/18/2025</a:t>
+              <a:t>11/19/2025</a:t>
             </a:fld>
             <a:endParaRPr lang="en-US"/>
           </a:p>
@@ -7357,7 +7362,7 @@
           <a:p>
             <a:fld id="{7DA38F49-B3E2-4BF0-BEC7-C30D34ABBB8D}" type="datetime1">
               <a:rPr lang="en-US" smtClean="0"/>
-              <a:t>11/18/2025</a:t>
+              <a:t>11/19/2025</a:t>
             </a:fld>
             <a:endParaRPr lang="en-US"/>
           </a:p>
@@ -8308,10 +8313,10 @@
       </p:sp>
       <p:pic>
         <p:nvPicPr>
-          <p:cNvPr id="4" name="Picture 3">
+          <p:cNvPr id="6" name="Picture 5" descr="A map of the state of pennsylvania&#10;&#10;AI-generated content may be incorrect.">
             <a:extLst>
               <a:ext uri="{FF2B5EF4-FFF2-40B4-BE49-F238E27FC236}">
-                <a16:creationId xmlns:a16="http://schemas.microsoft.com/office/drawing/2014/main" id="{B7A3E340-9F71-74A7-D093-C0FA47D7383D}"/>
+                <a16:creationId xmlns:a16="http://schemas.microsoft.com/office/drawing/2014/main" id="{B17B29EF-C0A3-8FC9-0FA7-B059FDB2DD04}"/>
               </a:ext>
             </a:extLst>
           </p:cNvPr>
@@ -8321,15 +8326,22 @@
           <p:nvPr/>
         </p:nvPicPr>
         <p:blipFill>
-          <a:blip r:embed="rId2"/>
+          <a:blip r:embed="rId2">
+            <a:extLst>
+              <a:ext uri="{28A0092B-C50C-407E-A947-70E740481C1C}">
+                <a14:useLocalDpi xmlns:a14="http://schemas.microsoft.com/office/drawing/2010/main" val="0"/>
+              </a:ext>
+            </a:extLst>
+          </a:blip>
+          <a:srcRect l="3213"/>
           <a:stretch>
             <a:fillRect/>
           </a:stretch>
         </p:blipFill>
         <p:spPr>
           <a:xfrm>
-            <a:off x="152400" y="2153084"/>
-            <a:ext cx="11591925" cy="2945180"/>
+            <a:off x="223354" y="2164773"/>
+            <a:ext cx="11745292" cy="2975794"/>
           </a:xfrm>
           <a:prstGeom prst="rect">
             <a:avLst/>
